--- a/public/fun/pack/pptx/familypro/가족소개프리미엄_32_아이와함께_토프아이보리.pptx
+++ b/public/fun/pack/pptx/familypro/가족소개프리미엄_32_아이와함께_토프아이보리.pptx
@@ -113,12 +113,12 @@
   <p:extLst>
     <p:ext uri="{521415D9-36F7-43E2-AB2F-B90AF26B5E84}">
       <p14:sectionLst xmlns:p14="http://schemas.microsoft.com/office/powerpoint/2010/main">
-        <p14:section name="시작" id="{3E2C58DD-473F-4AEC-8F92-819A39952137}">
+        <p14:section name="시작" id="{3400B17A-3DAD-40D2-8F1D-8CB84DC51BA4}">
           <p14:sldIdLst>
             <p14:sldId id="256"/>
           </p14:sldIdLst>
         </p14:section>
-        <p14:section name="본문" id="{482FA84E-7E64-4139-91DA-C5D661E69BDD}">
+        <p14:section name="본문" id="{BAC17AF8-84D4-4625-A67D-30F72E0643F4}">
           <p14:sldIdLst>
             <p14:sldId id="257"/>
             <p14:sldId id="258"/>
@@ -127,7 +127,7 @@
             <p14:sldId id="261"/>
           </p14:sldIdLst>
         </p14:section>
-        <p14:section name="마무리" id="{0A9CD0A1-779C-4948-8510-7A23128B2C8B}">
+        <p14:section name="마무리" id="{21757BC9-992F-48B1-A36F-27A42AA74C8C}">
           <p14:sldIdLst>
             <p14:sldId id="262"/>
           </p14:sldIdLst>
@@ -1524,7 +1524,7 @@
             </a:lvl1pPr>
           </a:lstStyle>
           <a:p>
-            <a:fld id="{BB39702A-7CE5-4343-AFC3-8706DF65B50E}" type="slidenum">
+            <a:fld id="{57941AB6-25FC-4E7D-B80F-21D85E8FD1FE}" type="slidenum">
               <a:rPr lang="en-US"/>
               <a:t>‹#›</a:t>
             </a:fld>
@@ -2122,7 +2122,7 @@
             </a:lvl1pPr>
           </a:lstStyle>
           <a:p>
-            <a:fld id="{4CF2B0C2-49D0-48DF-B306-5ED9D3024719}" type="slidenum">
+            <a:fld id="{F2655F6B-4DFD-4B5C-90B1-889C4DEEF7C3}" type="slidenum">
               <a:rPr lang="en-US"/>
               <a:t>‹#›</a:t>
             </a:fld>
@@ -2711,7 +2711,7 @@
             </a:lvl1pPr>
           </a:lstStyle>
           <a:p>
-            <a:fld id="{9F82DD82-F73C-421E-8DB9-BF1245C2E798}" type="slidenum">
+            <a:fld id="{D683C05A-9592-471E-82C6-B7FB25404C45}" type="slidenum">
               <a:rPr lang="en-US"/>
               <a:t>‹#›</a:t>
             </a:fld>
@@ -3514,7 +3514,7 @@
           <a:p>
             <a:r>
               <a:rPr lang="ko-KR"/>
-              <a:t>아이와 함께 · 0000. 00. 00</a:t>
+              <a:t>아이와 함께 · 날짜 입력</a:t>
             </a:r>
           </a:p>
         </p:txBody>
@@ -3875,7 +3875,7 @@
           <a:bodyPr/>
           <a:lstStyle/>
           <a:p>
-            <a:fld id="{CBB9F451-4DF3-4417-8349-234BBAD21B84}" type="slidenum">
+            <a:fld id="{576E6E35-6D8C-4825-B308-6B9932413D89}" type="slidenum">
               <a:rPr lang="en-US"/>
               <a:t>‹#›</a:t>
             </a:fld>
@@ -4675,7 +4675,7 @@
           <a:bodyPr/>
           <a:lstStyle/>
           <a:p>
-            <a:fld id="{B5DE3CDD-A6F0-4E29-A5BF-111FB2E4455B}" type="slidenum">
+            <a:fld id="{86A6C995-1E7F-4AEA-B006-9D33854D1233}" type="slidenum">
               <a:rPr lang="en-US"/>
               <a:t>‹#›</a:t>
             </a:fld>
@@ -5650,7 +5650,7 @@
           <a:bodyPr/>
           <a:lstStyle/>
           <a:p>
-            <a:fld id="{145FD995-DEEC-4FE2-8B83-A0827A3A9F1E}" type="slidenum">
+            <a:fld id="{2311C81A-1443-4C8D-9188-9D1D6C504720}" type="slidenum">
               <a:rPr lang="en-US"/>
               <a:t>‹#›</a:t>
             </a:fld>
@@ -6998,7 +6998,7 @@
           <a:bodyPr/>
           <a:lstStyle/>
           <a:p>
-            <a:fld id="{07C3CB0B-8214-4D2B-BEB9-AD464F52F864}" type="slidenum">
+            <a:fld id="{2CE6E52A-2AA4-4AAE-8B3F-489DCEBE03B0}" type="slidenum">
               <a:rPr lang="en-US"/>
               <a:t>‹#›</a:t>
             </a:fld>
@@ -7086,7 +7086,7 @@
           <a:bodyPr/>
           <a:lstStyle/>
           <a:p>
-            <a:fld id="{656B72C9-70B7-4702-8528-288622840515}" type="slidenum">
+            <a:fld id="{7A7B3C71-4F19-4DB2-B76C-B66C778E7F82}" type="slidenum">
               <a:rPr lang="en-US"/>
               <a:t>‹#›</a:t>
             </a:fld>
